--- a/docs/winf2026/slides/slides.pptx
+++ b/docs/winf2026/slides/slides.pptx
@@ -1056,7 +1056,7 @@
           <a:p/>
           <a:p>
             <a:r>
-              <a:t>出力一致は全入力のアルゴリズム同値性ではありません。旧120件は2モデル、seed 0〜2、2条件、L2終了の既報です。B4の追加roundのunknown_error2件はコード側NameErrorでありAPI障害ではありません。元ログには中断時の接続エラーがありますが、保存設定で再開した全件完了の記録を基準にしています。</a:t>
+              <a:t>出力一致は全入力のアルゴリズム同値性ではありません。旧120件は2モデル、seed 0〜2、2条件、L2終了の既報です。B4の追加roundでは未定義変数による実行時エラーが2件あり，いずれもコード側のNameErrorです。元ログには中断時の接続エラーがありますが、保存設定で再開した全件完了の記録を基準にしています。</a:t>
             </a:r>
           </a:p>
         </p:txBody>
@@ -1436,7 +1436,7 @@
           <a:p/>
           <a:p>
             <a:r>
-              <a:t>千組のうち455組が初期成功、545組が初期失敗です。救済率の分母はこの545組で、モデル率の単純平均ではありません。失敗類型も初期判定で固定します。B4では同じ分母を使いますが、同一コードの修正ではないため追加成功と呼びます。成功判定の主L3は指定入力と構造要件に限定されます。</a:t>
+              <a:t>千組のうち455組が初期成功、545組が初期失敗です。救済率の分母はこの545組で、モデル率の単純平均ではありません。失敗類型も初期判定で固定します。B4では同じ分母を使いますが、同一コードの修正ではないため追加成功と呼びます。成功判定のL3は指定入力と構造要件に限定されます。</a:t>
             </a:r>
           </a:p>
         </p:txBody>
@@ -8281,7 +8281,7 @@
                 <a:latin typeface="IPAexGothic"/>
                 <a:ea typeface="IPAexGothic"/>
               </a:rPr>
-              <a:t>指定入力の主L3・出典差・共有初期とタスク依存</a:t>
+              <a:t>指定入力のL3・出典差・共有初期とタスク依存</a:t>
             </a:r>
           </a:p>
         </p:txBody>
@@ -11852,7 +11852,7 @@
                           <a:latin typeface="IPAexGothic"/>
                           <a:ea typeface="IPAexGothic"/>
                         </a:rPr>
-                        <a:t>主L3</a:t>
+                        <a:t>L3</a:t>
                       </a:r>
                     </a:p>
                   </a:txBody>
@@ -16561,7 +16561,7 @@
                 <a:latin typeface="IPAexGothic"/>
                 <a:ea typeface="IPAexGothic"/>
               </a:rPr>
-              <a:t>主L3：読込み・構築・指定入力の出力一致 ＋ 所定の構造要件</a:t>
+              <a:t>L3成功：読込み・構築・指定入力の出力一致 ＋ 所定の構造要件</a:t>
             </a:r>
           </a:p>
         </p:txBody>
@@ -16692,7 +16692,7 @@
                 <a:latin typeface="IPAexGothic"/>
                 <a:ea typeface="IPAexGothic"/>
               </a:rPr>
-              <a:t>主L3は全入力のアルゴリズム同値性を保証しない</a:t>
+              <a:t>L3は全入力のアルゴリズム同値性を保証しない</a:t>
             </a:r>
           </a:p>
         </p:txBody>
